--- a/ubr3enrichmentlogo/UBR3_N_terminal_screen_paper_deck.pptx
+++ b/ubr3enrichmentlogo/UBR3_N_terminal_screen_paper_deck.pptx
@@ -8289,8 +8289,8 @@
         </p:blipFill>
         <p:spPr>
           <a:xfrm>
-            <a:off x="2412806" y="987552"/>
-            <a:ext cx="2855347" cy="5157216"/>
+            <a:off x="2294036" y="987552"/>
+            <a:ext cx="3092888" cy="5157216"/>
           </a:xfrm>
           <a:prstGeom prst="rect">
             <a:avLst/>
@@ -8770,8 +8770,8 @@
         </p:blipFill>
         <p:spPr>
           <a:xfrm>
-            <a:off x="438912" y="1156510"/>
-            <a:ext cx="6803136" cy="4819300"/>
+            <a:off x="438912" y="1062619"/>
+            <a:ext cx="6803136" cy="5007082"/>
           </a:xfrm>
           <a:prstGeom prst="rect">
             <a:avLst/>
@@ -9235,8 +9235,8 @@
         </p:blipFill>
         <p:spPr>
           <a:xfrm>
-            <a:off x="501808" y="987552"/>
-            <a:ext cx="6677343" cy="5157216"/>
+            <a:off x="707607" y="987552"/>
+            <a:ext cx="6265746" cy="5157216"/>
           </a:xfrm>
           <a:prstGeom prst="rect">
             <a:avLst/>
@@ -9700,8 +9700,8 @@
         </p:blipFill>
         <p:spPr>
           <a:xfrm>
-            <a:off x="438912" y="1014984"/>
-            <a:ext cx="6803136" cy="5102351"/>
+            <a:off x="438912" y="1220846"/>
+            <a:ext cx="6803136" cy="4690627"/>
           </a:xfrm>
           <a:prstGeom prst="rect">
             <a:avLst/>
